--- a/public/videos/repositories/bowling-score-hub/bowling-score-hub-tech-preview.pptx
+++ b/public/videos/repositories/bowling-score-hub/bowling-score-hub-tech-preview.pptx
@@ -134,7 +134,7 @@
           <p:cNvPr id="2" name="タイトル 1">
             <a:extLst>
               <a:ext uri="{FF2B5EF4-FFF2-40B4-BE49-F238E27FC236}">
-                <a16:creationId xmlns:a16="http://schemas.microsoft.com/office/drawing/2014/main" id="{2853928B-72F4-5C0F-4A03-F7A716BE7DDB}"/>
+                <a16:creationId xmlns:a16="http://schemas.microsoft.com/office/drawing/2014/main" id="{606B49DA-6A55-FA29-EE3B-73DFBDCF4A85}"/>
               </a:ext>
             </a:extLst>
           </p:cNvPr>
@@ -171,7 +171,7 @@
           <p:cNvPr id="3" name="字幕 2">
             <a:extLst>
               <a:ext uri="{FF2B5EF4-FFF2-40B4-BE49-F238E27FC236}">
-                <a16:creationId xmlns:a16="http://schemas.microsoft.com/office/drawing/2014/main" id="{A965B149-ADD3-FAC3-4D8B-30AF033A71C6}"/>
+                <a16:creationId xmlns:a16="http://schemas.microsoft.com/office/drawing/2014/main" id="{F138A129-5B81-722C-AC51-CA45AE456E8B}"/>
               </a:ext>
             </a:extLst>
           </p:cNvPr>
@@ -241,7 +241,7 @@
           <p:cNvPr id="4" name="日付プレースホルダー 3">
             <a:extLst>
               <a:ext uri="{FF2B5EF4-FFF2-40B4-BE49-F238E27FC236}">
-                <a16:creationId xmlns:a16="http://schemas.microsoft.com/office/drawing/2014/main" id="{41AB6947-085F-B356-C612-61CB13598122}"/>
+                <a16:creationId xmlns:a16="http://schemas.microsoft.com/office/drawing/2014/main" id="{6A5D45E1-B5DA-F67B-916B-0E5E83AA4C01}"/>
               </a:ext>
             </a:extLst>
           </p:cNvPr>
@@ -257,7 +257,7 @@
           <a:bodyPr/>
           <a:lstStyle/>
           <a:p>
-            <a:fld id="{BF4A4B2D-BA0A-4902-A22A-03282CEDE376}" type="datetimeFigureOut">
+            <a:fld id="{76B38A17-16AD-4227-AE0A-A0302FF79D97}" type="datetimeFigureOut">
               <a:rPr kumimoji="1" lang="ja-JP" altLang="en-US" smtClean="0"/>
               <a:t>2026/7/30</a:t>
             </a:fld>
@@ -270,7 +270,7 @@
           <p:cNvPr id="5" name="フッター プレースホルダー 4">
             <a:extLst>
               <a:ext uri="{FF2B5EF4-FFF2-40B4-BE49-F238E27FC236}">
-                <a16:creationId xmlns:a16="http://schemas.microsoft.com/office/drawing/2014/main" id="{4256F415-46DF-87F3-E5C4-FFB77BB36D7D}"/>
+                <a16:creationId xmlns:a16="http://schemas.microsoft.com/office/drawing/2014/main" id="{11C649EF-ECD3-76C5-6DA2-5E233D9FC80A}"/>
               </a:ext>
             </a:extLst>
           </p:cNvPr>
@@ -295,7 +295,7 @@
           <p:cNvPr id="6" name="スライド番号プレースホルダー 5">
             <a:extLst>
               <a:ext uri="{FF2B5EF4-FFF2-40B4-BE49-F238E27FC236}">
-                <a16:creationId xmlns:a16="http://schemas.microsoft.com/office/drawing/2014/main" id="{CF56939D-8655-E8EF-43CA-6F730F9143C6}"/>
+                <a16:creationId xmlns:a16="http://schemas.microsoft.com/office/drawing/2014/main" id="{7E02A2BF-CEC4-DBD4-C47D-DB14382F87F6}"/>
               </a:ext>
             </a:extLst>
           </p:cNvPr>
@@ -311,7 +311,7 @@
           <a:bodyPr/>
           <a:lstStyle/>
           <a:p>
-            <a:fld id="{C7A2DB92-9456-47D0-8600-630C5FFA4FE3}" type="slidenum">
+            <a:fld id="{7A7055FF-A2D1-4FD4-8ACA-4FA8879A8D96}" type="slidenum">
               <a:rPr kumimoji="1" lang="ja-JP" altLang="en-US" smtClean="0"/>
               <a:t>‹#›</a:t>
             </a:fld>
@@ -322,7 +322,7 @@
     </p:spTree>
     <p:extLst>
       <p:ext uri="{BB962C8B-B14F-4D97-AF65-F5344CB8AC3E}">
-        <p14:creationId xmlns:p14="http://schemas.microsoft.com/office/powerpoint/2010/main" val="2356672523"/>
+        <p14:creationId xmlns:p14="http://schemas.microsoft.com/office/powerpoint/2010/main" val="2677502380"/>
       </p:ext>
     </p:extLst>
   </p:cSld>
@@ -354,7 +354,7 @@
           <p:cNvPr id="2" name="タイトル 1">
             <a:extLst>
               <a:ext uri="{FF2B5EF4-FFF2-40B4-BE49-F238E27FC236}">
-                <a16:creationId xmlns:a16="http://schemas.microsoft.com/office/drawing/2014/main" id="{F850C733-AF69-7B0E-2C43-05FB50FCE378}"/>
+                <a16:creationId xmlns:a16="http://schemas.microsoft.com/office/drawing/2014/main" id="{8BECAF9A-EC88-E819-3181-43867D9EF9E5}"/>
               </a:ext>
             </a:extLst>
           </p:cNvPr>
@@ -382,7 +382,7 @@
           <p:cNvPr id="3" name="縦書きテキスト プレースホルダー 2">
             <a:extLst>
               <a:ext uri="{FF2B5EF4-FFF2-40B4-BE49-F238E27FC236}">
-                <a16:creationId xmlns:a16="http://schemas.microsoft.com/office/drawing/2014/main" id="{A6ADE962-872D-D2CC-E608-8D5C1D9776C4}"/>
+                <a16:creationId xmlns:a16="http://schemas.microsoft.com/office/drawing/2014/main" id="{5025EB9B-9572-D350-17DD-540BFCFC3DAA}"/>
               </a:ext>
             </a:extLst>
           </p:cNvPr>
@@ -471,7 +471,7 @@
           <p:cNvPr id="4" name="日付プレースホルダー 3">
             <a:extLst>
               <a:ext uri="{FF2B5EF4-FFF2-40B4-BE49-F238E27FC236}">
-                <a16:creationId xmlns:a16="http://schemas.microsoft.com/office/drawing/2014/main" id="{7A6AC636-BA74-6E05-50B9-CC549969E879}"/>
+                <a16:creationId xmlns:a16="http://schemas.microsoft.com/office/drawing/2014/main" id="{0B565797-A44C-8BF6-F99C-21693E9E16A9}"/>
               </a:ext>
             </a:extLst>
           </p:cNvPr>
@@ -487,7 +487,7 @@
           <a:bodyPr/>
           <a:lstStyle/>
           <a:p>
-            <a:fld id="{BF4A4B2D-BA0A-4902-A22A-03282CEDE376}" type="datetimeFigureOut">
+            <a:fld id="{76B38A17-16AD-4227-AE0A-A0302FF79D97}" type="datetimeFigureOut">
               <a:rPr kumimoji="1" lang="ja-JP" altLang="en-US" smtClean="0"/>
               <a:t>2026/7/30</a:t>
             </a:fld>
@@ -500,7 +500,7 @@
           <p:cNvPr id="5" name="フッター プレースホルダー 4">
             <a:extLst>
               <a:ext uri="{FF2B5EF4-FFF2-40B4-BE49-F238E27FC236}">
-                <a16:creationId xmlns:a16="http://schemas.microsoft.com/office/drawing/2014/main" id="{AF75C8E1-9EDB-136F-F78D-9ACE5FA26E1E}"/>
+                <a16:creationId xmlns:a16="http://schemas.microsoft.com/office/drawing/2014/main" id="{5703C0E5-19AA-F2D2-ED38-4891B26F317A}"/>
               </a:ext>
             </a:extLst>
           </p:cNvPr>
@@ -525,7 +525,7 @@
           <p:cNvPr id="6" name="スライド番号プレースホルダー 5">
             <a:extLst>
               <a:ext uri="{FF2B5EF4-FFF2-40B4-BE49-F238E27FC236}">
-                <a16:creationId xmlns:a16="http://schemas.microsoft.com/office/drawing/2014/main" id="{84B388AC-46B7-89B3-4DF2-7C22BB5D16BA}"/>
+                <a16:creationId xmlns:a16="http://schemas.microsoft.com/office/drawing/2014/main" id="{85A42260-A89E-C584-187C-615B62F6DE86}"/>
               </a:ext>
             </a:extLst>
           </p:cNvPr>
@@ -541,7 +541,7 @@
           <a:bodyPr/>
           <a:lstStyle/>
           <a:p>
-            <a:fld id="{C7A2DB92-9456-47D0-8600-630C5FFA4FE3}" type="slidenum">
+            <a:fld id="{7A7055FF-A2D1-4FD4-8ACA-4FA8879A8D96}" type="slidenum">
               <a:rPr kumimoji="1" lang="ja-JP" altLang="en-US" smtClean="0"/>
               <a:t>‹#›</a:t>
             </a:fld>
@@ -552,7 +552,7 @@
     </p:spTree>
     <p:extLst>
       <p:ext uri="{BB962C8B-B14F-4D97-AF65-F5344CB8AC3E}">
-        <p14:creationId xmlns:p14="http://schemas.microsoft.com/office/powerpoint/2010/main" val="3796237647"/>
+        <p14:creationId xmlns:p14="http://schemas.microsoft.com/office/powerpoint/2010/main" val="2189513949"/>
       </p:ext>
     </p:extLst>
   </p:cSld>
@@ -584,7 +584,7 @@
           <p:cNvPr id="2" name="縦書きタイトル 1">
             <a:extLst>
               <a:ext uri="{FF2B5EF4-FFF2-40B4-BE49-F238E27FC236}">
-                <a16:creationId xmlns:a16="http://schemas.microsoft.com/office/drawing/2014/main" id="{018CB8C0-6C4F-E276-9DAE-E26904451535}"/>
+                <a16:creationId xmlns:a16="http://schemas.microsoft.com/office/drawing/2014/main" id="{F629C0C3-0769-7132-58E0-D2A926A79F81}"/>
               </a:ext>
             </a:extLst>
           </p:cNvPr>
@@ -617,7 +617,7 @@
           <p:cNvPr id="3" name="縦書きテキスト プレースホルダー 2">
             <a:extLst>
               <a:ext uri="{FF2B5EF4-FFF2-40B4-BE49-F238E27FC236}">
-                <a16:creationId xmlns:a16="http://schemas.microsoft.com/office/drawing/2014/main" id="{FEAE64AC-EC7B-58D9-5CC8-2735CB5E37FA}"/>
+                <a16:creationId xmlns:a16="http://schemas.microsoft.com/office/drawing/2014/main" id="{AB7E8209-3AD8-78D7-7CA8-6B8899797100}"/>
               </a:ext>
             </a:extLst>
           </p:cNvPr>
@@ -711,7 +711,7 @@
           <p:cNvPr id="4" name="日付プレースホルダー 3">
             <a:extLst>
               <a:ext uri="{FF2B5EF4-FFF2-40B4-BE49-F238E27FC236}">
-                <a16:creationId xmlns:a16="http://schemas.microsoft.com/office/drawing/2014/main" id="{EFC04449-B603-DA0D-5DE9-01E7E3DA1BFD}"/>
+                <a16:creationId xmlns:a16="http://schemas.microsoft.com/office/drawing/2014/main" id="{4622CA00-0E59-A6E9-2595-DAC8070B6D8A}"/>
               </a:ext>
             </a:extLst>
           </p:cNvPr>
@@ -727,7 +727,7 @@
           <a:bodyPr/>
           <a:lstStyle/>
           <a:p>
-            <a:fld id="{BF4A4B2D-BA0A-4902-A22A-03282CEDE376}" type="datetimeFigureOut">
+            <a:fld id="{76B38A17-16AD-4227-AE0A-A0302FF79D97}" type="datetimeFigureOut">
               <a:rPr kumimoji="1" lang="ja-JP" altLang="en-US" smtClean="0"/>
               <a:t>2026/7/30</a:t>
             </a:fld>
@@ -740,7 +740,7 @@
           <p:cNvPr id="5" name="フッター プレースホルダー 4">
             <a:extLst>
               <a:ext uri="{FF2B5EF4-FFF2-40B4-BE49-F238E27FC236}">
-                <a16:creationId xmlns:a16="http://schemas.microsoft.com/office/drawing/2014/main" id="{6157ACDE-38E2-6DD9-33C7-64EF3EFF94B6}"/>
+                <a16:creationId xmlns:a16="http://schemas.microsoft.com/office/drawing/2014/main" id="{8BD38695-B01D-E6EF-A98D-3C4A825597B7}"/>
               </a:ext>
             </a:extLst>
           </p:cNvPr>
@@ -765,7 +765,7 @@
           <p:cNvPr id="6" name="スライド番号プレースホルダー 5">
             <a:extLst>
               <a:ext uri="{FF2B5EF4-FFF2-40B4-BE49-F238E27FC236}">
-                <a16:creationId xmlns:a16="http://schemas.microsoft.com/office/drawing/2014/main" id="{C4D35310-8BA7-788D-58D8-21CCC6A900D3}"/>
+                <a16:creationId xmlns:a16="http://schemas.microsoft.com/office/drawing/2014/main" id="{456FD834-EAE4-413C-1EE5-B83D494CF5C0}"/>
               </a:ext>
             </a:extLst>
           </p:cNvPr>
@@ -781,7 +781,7 @@
           <a:bodyPr/>
           <a:lstStyle/>
           <a:p>
-            <a:fld id="{C7A2DB92-9456-47D0-8600-630C5FFA4FE3}" type="slidenum">
+            <a:fld id="{7A7055FF-A2D1-4FD4-8ACA-4FA8879A8D96}" type="slidenum">
               <a:rPr kumimoji="1" lang="ja-JP" altLang="en-US" smtClean="0"/>
               <a:t>‹#›</a:t>
             </a:fld>
@@ -792,7 +792,7 @@
     </p:spTree>
     <p:extLst>
       <p:ext uri="{BB962C8B-B14F-4D97-AF65-F5344CB8AC3E}">
-        <p14:creationId xmlns:p14="http://schemas.microsoft.com/office/powerpoint/2010/main" val="2778348895"/>
+        <p14:creationId xmlns:p14="http://schemas.microsoft.com/office/powerpoint/2010/main" val="1392715619"/>
       </p:ext>
     </p:extLst>
   </p:cSld>
@@ -824,7 +824,7 @@
           <p:cNvPr id="2" name="タイトル 1">
             <a:extLst>
               <a:ext uri="{FF2B5EF4-FFF2-40B4-BE49-F238E27FC236}">
-                <a16:creationId xmlns:a16="http://schemas.microsoft.com/office/drawing/2014/main" id="{17A9259F-4650-B76B-140B-B57B2F2325B3}"/>
+                <a16:creationId xmlns:a16="http://schemas.microsoft.com/office/drawing/2014/main" id="{DD5E8641-37EE-B3A5-A56A-E4901EB4E80A}"/>
               </a:ext>
             </a:extLst>
           </p:cNvPr>
@@ -852,7 +852,7 @@
           <p:cNvPr id="3" name="コンテンツ プレースホルダー 2">
             <a:extLst>
               <a:ext uri="{FF2B5EF4-FFF2-40B4-BE49-F238E27FC236}">
-                <a16:creationId xmlns:a16="http://schemas.microsoft.com/office/drawing/2014/main" id="{617533E2-4858-4F57-CEA2-F106D0335C98}"/>
+                <a16:creationId xmlns:a16="http://schemas.microsoft.com/office/drawing/2014/main" id="{30899928-F293-82E3-AFDE-48291E06D8C0}"/>
               </a:ext>
             </a:extLst>
           </p:cNvPr>
@@ -941,7 +941,7 @@
           <p:cNvPr id="4" name="日付プレースホルダー 3">
             <a:extLst>
               <a:ext uri="{FF2B5EF4-FFF2-40B4-BE49-F238E27FC236}">
-                <a16:creationId xmlns:a16="http://schemas.microsoft.com/office/drawing/2014/main" id="{12F43321-899C-5236-DAED-B22B10B6EB07}"/>
+                <a16:creationId xmlns:a16="http://schemas.microsoft.com/office/drawing/2014/main" id="{FE764662-9CFF-F74E-044F-604F2C76AC22}"/>
               </a:ext>
             </a:extLst>
           </p:cNvPr>
@@ -957,7 +957,7 @@
           <a:bodyPr/>
           <a:lstStyle/>
           <a:p>
-            <a:fld id="{BF4A4B2D-BA0A-4902-A22A-03282CEDE376}" type="datetimeFigureOut">
+            <a:fld id="{76B38A17-16AD-4227-AE0A-A0302FF79D97}" type="datetimeFigureOut">
               <a:rPr kumimoji="1" lang="ja-JP" altLang="en-US" smtClean="0"/>
               <a:t>2026/7/30</a:t>
             </a:fld>
@@ -970,7 +970,7 @@
           <p:cNvPr id="5" name="フッター プレースホルダー 4">
             <a:extLst>
               <a:ext uri="{FF2B5EF4-FFF2-40B4-BE49-F238E27FC236}">
-                <a16:creationId xmlns:a16="http://schemas.microsoft.com/office/drawing/2014/main" id="{D650E2C5-0825-5BD5-FE9A-B5A1C8AEAC18}"/>
+                <a16:creationId xmlns:a16="http://schemas.microsoft.com/office/drawing/2014/main" id="{06DB42E6-9575-D02B-D8EA-023902BF2FAA}"/>
               </a:ext>
             </a:extLst>
           </p:cNvPr>
@@ -995,7 +995,7 @@
           <p:cNvPr id="6" name="スライド番号プレースホルダー 5">
             <a:extLst>
               <a:ext uri="{FF2B5EF4-FFF2-40B4-BE49-F238E27FC236}">
-                <a16:creationId xmlns:a16="http://schemas.microsoft.com/office/drawing/2014/main" id="{43D86EBE-FDE0-F4B7-4CD9-4491DD69D7C1}"/>
+                <a16:creationId xmlns:a16="http://schemas.microsoft.com/office/drawing/2014/main" id="{91128357-BE33-8699-9F95-2FCD5B43AA23}"/>
               </a:ext>
             </a:extLst>
           </p:cNvPr>
@@ -1011,7 +1011,7 @@
           <a:bodyPr/>
           <a:lstStyle/>
           <a:p>
-            <a:fld id="{C7A2DB92-9456-47D0-8600-630C5FFA4FE3}" type="slidenum">
+            <a:fld id="{7A7055FF-A2D1-4FD4-8ACA-4FA8879A8D96}" type="slidenum">
               <a:rPr kumimoji="1" lang="ja-JP" altLang="en-US" smtClean="0"/>
               <a:t>‹#›</a:t>
             </a:fld>
@@ -1022,7 +1022,7 @@
     </p:spTree>
     <p:extLst>
       <p:ext uri="{BB962C8B-B14F-4D97-AF65-F5344CB8AC3E}">
-        <p14:creationId xmlns:p14="http://schemas.microsoft.com/office/powerpoint/2010/main" val="430973076"/>
+        <p14:creationId xmlns:p14="http://schemas.microsoft.com/office/powerpoint/2010/main" val="2356164504"/>
       </p:ext>
     </p:extLst>
   </p:cSld>
@@ -1054,7 +1054,7 @@
           <p:cNvPr id="2" name="タイトル 1">
             <a:extLst>
               <a:ext uri="{FF2B5EF4-FFF2-40B4-BE49-F238E27FC236}">
-                <a16:creationId xmlns:a16="http://schemas.microsoft.com/office/drawing/2014/main" id="{1F9DC721-8940-0814-CDB4-AEEE0B0EC88D}"/>
+                <a16:creationId xmlns:a16="http://schemas.microsoft.com/office/drawing/2014/main" id="{76B10D5D-0774-1EEA-8414-9ED7DD5678B4}"/>
               </a:ext>
             </a:extLst>
           </p:cNvPr>
@@ -1091,7 +1091,7 @@
           <p:cNvPr id="3" name="テキスト プレースホルダー 2">
             <a:extLst>
               <a:ext uri="{FF2B5EF4-FFF2-40B4-BE49-F238E27FC236}">
-                <a16:creationId xmlns:a16="http://schemas.microsoft.com/office/drawing/2014/main" id="{994DE4C1-269E-B52A-CBD2-9C92BB03A852}"/>
+                <a16:creationId xmlns:a16="http://schemas.microsoft.com/office/drawing/2014/main" id="{007425B3-686A-CD39-42BC-6EC004E8DB6D}"/>
               </a:ext>
             </a:extLst>
           </p:cNvPr>
@@ -1216,7 +1216,7 @@
           <p:cNvPr id="4" name="日付プレースホルダー 3">
             <a:extLst>
               <a:ext uri="{FF2B5EF4-FFF2-40B4-BE49-F238E27FC236}">
-                <a16:creationId xmlns:a16="http://schemas.microsoft.com/office/drawing/2014/main" id="{53CA8A90-B6DC-FFE7-AC00-CBCBAE956CAE}"/>
+                <a16:creationId xmlns:a16="http://schemas.microsoft.com/office/drawing/2014/main" id="{24BE91C9-C2D1-E245-C083-65B9962FCF5A}"/>
               </a:ext>
             </a:extLst>
           </p:cNvPr>
@@ -1232,7 +1232,7 @@
           <a:bodyPr/>
           <a:lstStyle/>
           <a:p>
-            <a:fld id="{BF4A4B2D-BA0A-4902-A22A-03282CEDE376}" type="datetimeFigureOut">
+            <a:fld id="{76B38A17-16AD-4227-AE0A-A0302FF79D97}" type="datetimeFigureOut">
               <a:rPr kumimoji="1" lang="ja-JP" altLang="en-US" smtClean="0"/>
               <a:t>2026/7/30</a:t>
             </a:fld>
@@ -1245,7 +1245,7 @@
           <p:cNvPr id="5" name="フッター プレースホルダー 4">
             <a:extLst>
               <a:ext uri="{FF2B5EF4-FFF2-40B4-BE49-F238E27FC236}">
-                <a16:creationId xmlns:a16="http://schemas.microsoft.com/office/drawing/2014/main" id="{3973B199-0C94-7B43-E931-0AA73520D7F7}"/>
+                <a16:creationId xmlns:a16="http://schemas.microsoft.com/office/drawing/2014/main" id="{22D5D9FD-889B-3483-34CE-2CDD1D042EBD}"/>
               </a:ext>
             </a:extLst>
           </p:cNvPr>
@@ -1270,7 +1270,7 @@
           <p:cNvPr id="6" name="スライド番号プレースホルダー 5">
             <a:extLst>
               <a:ext uri="{FF2B5EF4-FFF2-40B4-BE49-F238E27FC236}">
-                <a16:creationId xmlns:a16="http://schemas.microsoft.com/office/drawing/2014/main" id="{BCC3AC7E-0BD8-E046-0D32-26F15FD30CFF}"/>
+                <a16:creationId xmlns:a16="http://schemas.microsoft.com/office/drawing/2014/main" id="{1E5A1B17-418A-E2BC-C052-A8A7BE06746D}"/>
               </a:ext>
             </a:extLst>
           </p:cNvPr>
@@ -1286,7 +1286,7 @@
           <a:bodyPr/>
           <a:lstStyle/>
           <a:p>
-            <a:fld id="{C7A2DB92-9456-47D0-8600-630C5FFA4FE3}" type="slidenum">
+            <a:fld id="{7A7055FF-A2D1-4FD4-8ACA-4FA8879A8D96}" type="slidenum">
               <a:rPr kumimoji="1" lang="ja-JP" altLang="en-US" smtClean="0"/>
               <a:t>‹#›</a:t>
             </a:fld>
@@ -1297,7 +1297,7 @@
     </p:spTree>
     <p:extLst>
       <p:ext uri="{BB962C8B-B14F-4D97-AF65-F5344CB8AC3E}">
-        <p14:creationId xmlns:p14="http://schemas.microsoft.com/office/powerpoint/2010/main" val="243690648"/>
+        <p14:creationId xmlns:p14="http://schemas.microsoft.com/office/powerpoint/2010/main" val="2124346278"/>
       </p:ext>
     </p:extLst>
   </p:cSld>
@@ -1329,7 +1329,7 @@
           <p:cNvPr id="2" name="タイトル 1">
             <a:extLst>
               <a:ext uri="{FF2B5EF4-FFF2-40B4-BE49-F238E27FC236}">
-                <a16:creationId xmlns:a16="http://schemas.microsoft.com/office/drawing/2014/main" id="{E6EB00A9-2931-2CA2-02C5-A66395A4AC04}"/>
+                <a16:creationId xmlns:a16="http://schemas.microsoft.com/office/drawing/2014/main" id="{B4E6290D-563E-8DC1-F712-C7CE8BA17CB4}"/>
               </a:ext>
             </a:extLst>
           </p:cNvPr>
@@ -1357,7 +1357,7 @@
           <p:cNvPr id="3" name="コンテンツ プレースホルダー 2">
             <a:extLst>
               <a:ext uri="{FF2B5EF4-FFF2-40B4-BE49-F238E27FC236}">
-                <a16:creationId xmlns:a16="http://schemas.microsoft.com/office/drawing/2014/main" id="{82437F39-8214-9A9E-5328-A410CD428D97}"/>
+                <a16:creationId xmlns:a16="http://schemas.microsoft.com/office/drawing/2014/main" id="{F5525A6B-5A46-BC82-32AC-F6F0273D3486}"/>
               </a:ext>
             </a:extLst>
           </p:cNvPr>
@@ -1451,7 +1451,7 @@
           <p:cNvPr id="4" name="コンテンツ プレースホルダー 3">
             <a:extLst>
               <a:ext uri="{FF2B5EF4-FFF2-40B4-BE49-F238E27FC236}">
-                <a16:creationId xmlns:a16="http://schemas.microsoft.com/office/drawing/2014/main" id="{5C4158AD-D648-1985-02A9-933D6D8D4246}"/>
+                <a16:creationId xmlns:a16="http://schemas.microsoft.com/office/drawing/2014/main" id="{68E5C07E-14C5-6295-D4E8-B79B8983706F}"/>
               </a:ext>
             </a:extLst>
           </p:cNvPr>
@@ -1545,7 +1545,7 @@
           <p:cNvPr id="5" name="日付プレースホルダー 4">
             <a:extLst>
               <a:ext uri="{FF2B5EF4-FFF2-40B4-BE49-F238E27FC236}">
-                <a16:creationId xmlns:a16="http://schemas.microsoft.com/office/drawing/2014/main" id="{6908BC5A-4F40-BED4-32EF-EBA93DC8E080}"/>
+                <a16:creationId xmlns:a16="http://schemas.microsoft.com/office/drawing/2014/main" id="{BF7CBAC3-0AA6-E98F-ACEB-063E7E43DADF}"/>
               </a:ext>
             </a:extLst>
           </p:cNvPr>
@@ -1561,7 +1561,7 @@
           <a:bodyPr/>
           <a:lstStyle/>
           <a:p>
-            <a:fld id="{BF4A4B2D-BA0A-4902-A22A-03282CEDE376}" type="datetimeFigureOut">
+            <a:fld id="{76B38A17-16AD-4227-AE0A-A0302FF79D97}" type="datetimeFigureOut">
               <a:rPr kumimoji="1" lang="ja-JP" altLang="en-US" smtClean="0"/>
               <a:t>2026/7/30</a:t>
             </a:fld>
@@ -1574,7 +1574,7 @@
           <p:cNvPr id="6" name="フッター プレースホルダー 5">
             <a:extLst>
               <a:ext uri="{FF2B5EF4-FFF2-40B4-BE49-F238E27FC236}">
-                <a16:creationId xmlns:a16="http://schemas.microsoft.com/office/drawing/2014/main" id="{8464C883-4375-1DE9-666A-A6B3912FFE77}"/>
+                <a16:creationId xmlns:a16="http://schemas.microsoft.com/office/drawing/2014/main" id="{F75AF902-3409-7B00-DF66-ABC7850FB3D7}"/>
               </a:ext>
             </a:extLst>
           </p:cNvPr>
@@ -1599,7 +1599,7 @@
           <p:cNvPr id="7" name="スライド番号プレースホルダー 6">
             <a:extLst>
               <a:ext uri="{FF2B5EF4-FFF2-40B4-BE49-F238E27FC236}">
-                <a16:creationId xmlns:a16="http://schemas.microsoft.com/office/drawing/2014/main" id="{DECBFC74-B8EC-E2AE-F442-628830718191}"/>
+                <a16:creationId xmlns:a16="http://schemas.microsoft.com/office/drawing/2014/main" id="{C596039A-2FCE-5BD5-14E8-48CBC0A560A5}"/>
               </a:ext>
             </a:extLst>
           </p:cNvPr>
@@ -1615,7 +1615,7 @@
           <a:bodyPr/>
           <a:lstStyle/>
           <a:p>
-            <a:fld id="{C7A2DB92-9456-47D0-8600-630C5FFA4FE3}" type="slidenum">
+            <a:fld id="{7A7055FF-A2D1-4FD4-8ACA-4FA8879A8D96}" type="slidenum">
               <a:rPr kumimoji="1" lang="ja-JP" altLang="en-US" smtClean="0"/>
               <a:t>‹#›</a:t>
             </a:fld>
@@ -1626,7 +1626,7 @@
     </p:spTree>
     <p:extLst>
       <p:ext uri="{BB962C8B-B14F-4D97-AF65-F5344CB8AC3E}">
-        <p14:creationId xmlns:p14="http://schemas.microsoft.com/office/powerpoint/2010/main" val="2885226075"/>
+        <p14:creationId xmlns:p14="http://schemas.microsoft.com/office/powerpoint/2010/main" val="2878164771"/>
       </p:ext>
     </p:extLst>
   </p:cSld>
@@ -1658,7 +1658,7 @@
           <p:cNvPr id="2" name="タイトル 1">
             <a:extLst>
               <a:ext uri="{FF2B5EF4-FFF2-40B4-BE49-F238E27FC236}">
-                <a16:creationId xmlns:a16="http://schemas.microsoft.com/office/drawing/2014/main" id="{AE2AF1B3-64B9-A49F-D06A-60A42E518535}"/>
+                <a16:creationId xmlns:a16="http://schemas.microsoft.com/office/drawing/2014/main" id="{3808C54B-B1E4-7D7F-EBDE-F565E2312639}"/>
               </a:ext>
             </a:extLst>
           </p:cNvPr>
@@ -1691,7 +1691,7 @@
           <p:cNvPr id="3" name="テキスト プレースホルダー 2">
             <a:extLst>
               <a:ext uri="{FF2B5EF4-FFF2-40B4-BE49-F238E27FC236}">
-                <a16:creationId xmlns:a16="http://schemas.microsoft.com/office/drawing/2014/main" id="{8EBB7FAE-0F24-5069-AA54-499169A1B7C7}"/>
+                <a16:creationId xmlns:a16="http://schemas.microsoft.com/office/drawing/2014/main" id="{1AC64FDD-B3C7-5C4F-ED75-8C7FF425CB93}"/>
               </a:ext>
             </a:extLst>
           </p:cNvPr>
@@ -1762,7 +1762,7 @@
           <p:cNvPr id="4" name="コンテンツ プレースホルダー 3">
             <a:extLst>
               <a:ext uri="{FF2B5EF4-FFF2-40B4-BE49-F238E27FC236}">
-                <a16:creationId xmlns:a16="http://schemas.microsoft.com/office/drawing/2014/main" id="{9CF92DA6-D6F8-5539-FE4B-1B5C089B1C1A}"/>
+                <a16:creationId xmlns:a16="http://schemas.microsoft.com/office/drawing/2014/main" id="{893304D4-CC17-E719-EDF5-257BAF786225}"/>
               </a:ext>
             </a:extLst>
           </p:cNvPr>
@@ -1856,7 +1856,7 @@
           <p:cNvPr id="5" name="テキスト プレースホルダー 4">
             <a:extLst>
               <a:ext uri="{FF2B5EF4-FFF2-40B4-BE49-F238E27FC236}">
-                <a16:creationId xmlns:a16="http://schemas.microsoft.com/office/drawing/2014/main" id="{E34A8F00-FCC5-BDF7-E100-B70A64C7A2A2}"/>
+                <a16:creationId xmlns:a16="http://schemas.microsoft.com/office/drawing/2014/main" id="{60F5C28B-4CBB-F9EF-BC89-FB9F7690F238}"/>
               </a:ext>
             </a:extLst>
           </p:cNvPr>
@@ -1927,7 +1927,7 @@
           <p:cNvPr id="6" name="コンテンツ プレースホルダー 5">
             <a:extLst>
               <a:ext uri="{FF2B5EF4-FFF2-40B4-BE49-F238E27FC236}">
-                <a16:creationId xmlns:a16="http://schemas.microsoft.com/office/drawing/2014/main" id="{26486F8E-271D-7FCF-720E-12305D61DBC3}"/>
+                <a16:creationId xmlns:a16="http://schemas.microsoft.com/office/drawing/2014/main" id="{35B0658B-2CE2-E53D-64B2-1003B031F234}"/>
               </a:ext>
             </a:extLst>
           </p:cNvPr>
@@ -2021,7 +2021,7 @@
           <p:cNvPr id="7" name="日付プレースホルダー 6">
             <a:extLst>
               <a:ext uri="{FF2B5EF4-FFF2-40B4-BE49-F238E27FC236}">
-                <a16:creationId xmlns:a16="http://schemas.microsoft.com/office/drawing/2014/main" id="{5DB57F5A-AA78-A7CA-0CFD-0C21E689C026}"/>
+                <a16:creationId xmlns:a16="http://schemas.microsoft.com/office/drawing/2014/main" id="{46A4069D-7CFA-801E-EBEC-364C68A59578}"/>
               </a:ext>
             </a:extLst>
           </p:cNvPr>
@@ -2037,7 +2037,7 @@
           <a:bodyPr/>
           <a:lstStyle/>
           <a:p>
-            <a:fld id="{BF4A4B2D-BA0A-4902-A22A-03282CEDE376}" type="datetimeFigureOut">
+            <a:fld id="{76B38A17-16AD-4227-AE0A-A0302FF79D97}" type="datetimeFigureOut">
               <a:rPr kumimoji="1" lang="ja-JP" altLang="en-US" smtClean="0"/>
               <a:t>2026/7/30</a:t>
             </a:fld>
@@ -2050,7 +2050,7 @@
           <p:cNvPr id="8" name="フッター プレースホルダー 7">
             <a:extLst>
               <a:ext uri="{FF2B5EF4-FFF2-40B4-BE49-F238E27FC236}">
-                <a16:creationId xmlns:a16="http://schemas.microsoft.com/office/drawing/2014/main" id="{D65440B5-B41D-EA9A-B243-B1D5121833B3}"/>
+                <a16:creationId xmlns:a16="http://schemas.microsoft.com/office/drawing/2014/main" id="{D3B6647B-AA79-7EA1-5285-A914EA2F7ABA}"/>
               </a:ext>
             </a:extLst>
           </p:cNvPr>
@@ -2075,7 +2075,7 @@
           <p:cNvPr id="9" name="スライド番号プレースホルダー 8">
             <a:extLst>
               <a:ext uri="{FF2B5EF4-FFF2-40B4-BE49-F238E27FC236}">
-                <a16:creationId xmlns:a16="http://schemas.microsoft.com/office/drawing/2014/main" id="{CFE13C1F-4B75-74A5-8D58-9151A8548816}"/>
+                <a16:creationId xmlns:a16="http://schemas.microsoft.com/office/drawing/2014/main" id="{58622D2E-AD5A-1E10-8AA8-1B1F00764F30}"/>
               </a:ext>
             </a:extLst>
           </p:cNvPr>
@@ -2091,7 +2091,7 @@
           <a:bodyPr/>
           <a:lstStyle/>
           <a:p>
-            <a:fld id="{C7A2DB92-9456-47D0-8600-630C5FFA4FE3}" type="slidenum">
+            <a:fld id="{7A7055FF-A2D1-4FD4-8ACA-4FA8879A8D96}" type="slidenum">
               <a:rPr kumimoji="1" lang="ja-JP" altLang="en-US" smtClean="0"/>
               <a:t>‹#›</a:t>
             </a:fld>
@@ -2102,7 +2102,7 @@
     </p:spTree>
     <p:extLst>
       <p:ext uri="{BB962C8B-B14F-4D97-AF65-F5344CB8AC3E}">
-        <p14:creationId xmlns:p14="http://schemas.microsoft.com/office/powerpoint/2010/main" val="853785845"/>
+        <p14:creationId xmlns:p14="http://schemas.microsoft.com/office/powerpoint/2010/main" val="3740322707"/>
       </p:ext>
     </p:extLst>
   </p:cSld>
@@ -2134,7 +2134,7 @@
           <p:cNvPr id="2" name="タイトル 1">
             <a:extLst>
               <a:ext uri="{FF2B5EF4-FFF2-40B4-BE49-F238E27FC236}">
-                <a16:creationId xmlns:a16="http://schemas.microsoft.com/office/drawing/2014/main" id="{A0387F4E-955A-9DDD-2596-3560D82A1957}"/>
+                <a16:creationId xmlns:a16="http://schemas.microsoft.com/office/drawing/2014/main" id="{0955150C-9C74-75BD-E20D-03DB2760B14F}"/>
               </a:ext>
             </a:extLst>
           </p:cNvPr>
@@ -2162,7 +2162,7 @@
           <p:cNvPr id="3" name="日付プレースホルダー 2">
             <a:extLst>
               <a:ext uri="{FF2B5EF4-FFF2-40B4-BE49-F238E27FC236}">
-                <a16:creationId xmlns:a16="http://schemas.microsoft.com/office/drawing/2014/main" id="{52C4E1B2-325E-926D-78EC-FBF73A299406}"/>
+                <a16:creationId xmlns:a16="http://schemas.microsoft.com/office/drawing/2014/main" id="{67BD5DA1-D01C-CD94-8075-276B4D0A23D9}"/>
               </a:ext>
             </a:extLst>
           </p:cNvPr>
@@ -2178,7 +2178,7 @@
           <a:bodyPr/>
           <a:lstStyle/>
           <a:p>
-            <a:fld id="{BF4A4B2D-BA0A-4902-A22A-03282CEDE376}" type="datetimeFigureOut">
+            <a:fld id="{76B38A17-16AD-4227-AE0A-A0302FF79D97}" type="datetimeFigureOut">
               <a:rPr kumimoji="1" lang="ja-JP" altLang="en-US" smtClean="0"/>
               <a:t>2026/7/30</a:t>
             </a:fld>
@@ -2191,7 +2191,7 @@
           <p:cNvPr id="4" name="フッター プレースホルダー 3">
             <a:extLst>
               <a:ext uri="{FF2B5EF4-FFF2-40B4-BE49-F238E27FC236}">
-                <a16:creationId xmlns:a16="http://schemas.microsoft.com/office/drawing/2014/main" id="{FE0DDE27-6FD4-1C0F-FB4B-5FA3932B6B3C}"/>
+                <a16:creationId xmlns:a16="http://schemas.microsoft.com/office/drawing/2014/main" id="{6AD02FE2-F46A-4460-79C0-9FE4E0DFD913}"/>
               </a:ext>
             </a:extLst>
           </p:cNvPr>
@@ -2216,7 +2216,7 @@
           <p:cNvPr id="5" name="スライド番号プレースホルダー 4">
             <a:extLst>
               <a:ext uri="{FF2B5EF4-FFF2-40B4-BE49-F238E27FC236}">
-                <a16:creationId xmlns:a16="http://schemas.microsoft.com/office/drawing/2014/main" id="{2A077397-5CEF-093B-D37D-149131FD9491}"/>
+                <a16:creationId xmlns:a16="http://schemas.microsoft.com/office/drawing/2014/main" id="{D0569916-E52F-DB2F-F431-9BC2F26AFB07}"/>
               </a:ext>
             </a:extLst>
           </p:cNvPr>
@@ -2232,7 +2232,7 @@
           <a:bodyPr/>
           <a:lstStyle/>
           <a:p>
-            <a:fld id="{C7A2DB92-9456-47D0-8600-630C5FFA4FE3}" type="slidenum">
+            <a:fld id="{7A7055FF-A2D1-4FD4-8ACA-4FA8879A8D96}" type="slidenum">
               <a:rPr kumimoji="1" lang="ja-JP" altLang="en-US" smtClean="0"/>
               <a:t>‹#›</a:t>
             </a:fld>
@@ -2243,7 +2243,7 @@
     </p:spTree>
     <p:extLst>
       <p:ext uri="{BB962C8B-B14F-4D97-AF65-F5344CB8AC3E}">
-        <p14:creationId xmlns:p14="http://schemas.microsoft.com/office/powerpoint/2010/main" val="3444346277"/>
+        <p14:creationId xmlns:p14="http://schemas.microsoft.com/office/powerpoint/2010/main" val="2057569312"/>
       </p:ext>
     </p:extLst>
   </p:cSld>
@@ -2275,7 +2275,7 @@
           <p:cNvPr id="2" name="日付プレースホルダー 1">
             <a:extLst>
               <a:ext uri="{FF2B5EF4-FFF2-40B4-BE49-F238E27FC236}">
-                <a16:creationId xmlns:a16="http://schemas.microsoft.com/office/drawing/2014/main" id="{E6249B8C-95C5-1C00-3620-A03398A2FFAA}"/>
+                <a16:creationId xmlns:a16="http://schemas.microsoft.com/office/drawing/2014/main" id="{E552FC3A-16BC-F9C9-E81B-83E5153C4FCD}"/>
               </a:ext>
             </a:extLst>
           </p:cNvPr>
@@ -2291,7 +2291,7 @@
           <a:bodyPr/>
           <a:lstStyle/>
           <a:p>
-            <a:fld id="{BF4A4B2D-BA0A-4902-A22A-03282CEDE376}" type="datetimeFigureOut">
+            <a:fld id="{76B38A17-16AD-4227-AE0A-A0302FF79D97}" type="datetimeFigureOut">
               <a:rPr kumimoji="1" lang="ja-JP" altLang="en-US" smtClean="0"/>
               <a:t>2026/7/30</a:t>
             </a:fld>
@@ -2304,7 +2304,7 @@
           <p:cNvPr id="3" name="フッター プレースホルダー 2">
             <a:extLst>
               <a:ext uri="{FF2B5EF4-FFF2-40B4-BE49-F238E27FC236}">
-                <a16:creationId xmlns:a16="http://schemas.microsoft.com/office/drawing/2014/main" id="{8A8EB1EF-8E63-491E-DCF9-3624E9A78316}"/>
+                <a16:creationId xmlns:a16="http://schemas.microsoft.com/office/drawing/2014/main" id="{AB43D88A-270B-F209-1ECD-4914F0EFF231}"/>
               </a:ext>
             </a:extLst>
           </p:cNvPr>
@@ -2329,7 +2329,7 @@
           <p:cNvPr id="4" name="スライド番号プレースホルダー 3">
             <a:extLst>
               <a:ext uri="{FF2B5EF4-FFF2-40B4-BE49-F238E27FC236}">
-                <a16:creationId xmlns:a16="http://schemas.microsoft.com/office/drawing/2014/main" id="{F744D5C0-3F29-4736-644F-2FBFD9BD0465}"/>
+                <a16:creationId xmlns:a16="http://schemas.microsoft.com/office/drawing/2014/main" id="{586B555B-B945-B2FA-EA1F-3A0F00559FD7}"/>
               </a:ext>
             </a:extLst>
           </p:cNvPr>
@@ -2345,7 +2345,7 @@
           <a:bodyPr/>
           <a:lstStyle/>
           <a:p>
-            <a:fld id="{C7A2DB92-9456-47D0-8600-630C5FFA4FE3}" type="slidenum">
+            <a:fld id="{7A7055FF-A2D1-4FD4-8ACA-4FA8879A8D96}" type="slidenum">
               <a:rPr kumimoji="1" lang="ja-JP" altLang="en-US" smtClean="0"/>
               <a:t>‹#›</a:t>
             </a:fld>
@@ -2356,7 +2356,7 @@
     </p:spTree>
     <p:extLst>
       <p:ext uri="{BB962C8B-B14F-4D97-AF65-F5344CB8AC3E}">
-        <p14:creationId xmlns:p14="http://schemas.microsoft.com/office/powerpoint/2010/main" val="2787353631"/>
+        <p14:creationId xmlns:p14="http://schemas.microsoft.com/office/powerpoint/2010/main" val="3562210599"/>
       </p:ext>
     </p:extLst>
   </p:cSld>
@@ -2388,7 +2388,7 @@
           <p:cNvPr id="2" name="タイトル 1">
             <a:extLst>
               <a:ext uri="{FF2B5EF4-FFF2-40B4-BE49-F238E27FC236}">
-                <a16:creationId xmlns:a16="http://schemas.microsoft.com/office/drawing/2014/main" id="{ABD6BEAE-09D0-5C72-7252-A430AD787CDB}"/>
+                <a16:creationId xmlns:a16="http://schemas.microsoft.com/office/drawing/2014/main" id="{52009C0E-D4F6-5882-0746-C7B68009CD7E}"/>
               </a:ext>
             </a:extLst>
           </p:cNvPr>
@@ -2425,7 +2425,7 @@
           <p:cNvPr id="3" name="コンテンツ プレースホルダー 2">
             <a:extLst>
               <a:ext uri="{FF2B5EF4-FFF2-40B4-BE49-F238E27FC236}">
-                <a16:creationId xmlns:a16="http://schemas.microsoft.com/office/drawing/2014/main" id="{BE848103-F1A8-B53A-12EC-8382BFEA09EE}"/>
+                <a16:creationId xmlns:a16="http://schemas.microsoft.com/office/drawing/2014/main" id="{40D2D3A7-D744-9318-EB01-1CE56A653A1E}"/>
               </a:ext>
             </a:extLst>
           </p:cNvPr>
@@ -2547,7 +2547,7 @@
           <p:cNvPr id="4" name="テキスト プレースホルダー 3">
             <a:extLst>
               <a:ext uri="{FF2B5EF4-FFF2-40B4-BE49-F238E27FC236}">
-                <a16:creationId xmlns:a16="http://schemas.microsoft.com/office/drawing/2014/main" id="{F42CCC76-F203-5B94-0E24-B1BC94A9DBA5}"/>
+                <a16:creationId xmlns:a16="http://schemas.microsoft.com/office/drawing/2014/main" id="{16391821-5CE1-331D-3771-52C264A9E425}"/>
               </a:ext>
             </a:extLst>
           </p:cNvPr>
@@ -2618,7 +2618,7 @@
           <p:cNvPr id="5" name="日付プレースホルダー 4">
             <a:extLst>
               <a:ext uri="{FF2B5EF4-FFF2-40B4-BE49-F238E27FC236}">
-                <a16:creationId xmlns:a16="http://schemas.microsoft.com/office/drawing/2014/main" id="{D4EC9A68-7CD8-5CAB-A9A9-6D2D576D8528}"/>
+                <a16:creationId xmlns:a16="http://schemas.microsoft.com/office/drawing/2014/main" id="{39969BA2-077C-A6EB-A159-BA5196917C6F}"/>
               </a:ext>
             </a:extLst>
           </p:cNvPr>
@@ -2634,7 +2634,7 @@
           <a:bodyPr/>
           <a:lstStyle/>
           <a:p>
-            <a:fld id="{BF4A4B2D-BA0A-4902-A22A-03282CEDE376}" type="datetimeFigureOut">
+            <a:fld id="{76B38A17-16AD-4227-AE0A-A0302FF79D97}" type="datetimeFigureOut">
               <a:rPr kumimoji="1" lang="ja-JP" altLang="en-US" smtClean="0"/>
               <a:t>2026/7/30</a:t>
             </a:fld>
@@ -2647,7 +2647,7 @@
           <p:cNvPr id="6" name="フッター プレースホルダー 5">
             <a:extLst>
               <a:ext uri="{FF2B5EF4-FFF2-40B4-BE49-F238E27FC236}">
-                <a16:creationId xmlns:a16="http://schemas.microsoft.com/office/drawing/2014/main" id="{D4B94B93-EE8C-DC4B-7ED0-C0E86F5FF6AF}"/>
+                <a16:creationId xmlns:a16="http://schemas.microsoft.com/office/drawing/2014/main" id="{15D181FD-437E-464C-4A4E-4FB3B681225B}"/>
               </a:ext>
             </a:extLst>
           </p:cNvPr>
@@ -2672,7 +2672,7 @@
           <p:cNvPr id="7" name="スライド番号プレースホルダー 6">
             <a:extLst>
               <a:ext uri="{FF2B5EF4-FFF2-40B4-BE49-F238E27FC236}">
-                <a16:creationId xmlns:a16="http://schemas.microsoft.com/office/drawing/2014/main" id="{3F2E5555-DE95-8818-9A8C-341E1A9E28BA}"/>
+                <a16:creationId xmlns:a16="http://schemas.microsoft.com/office/drawing/2014/main" id="{6FD49AC7-152B-0186-1ADD-FFDFE2C79EC0}"/>
               </a:ext>
             </a:extLst>
           </p:cNvPr>
@@ -2688,7 +2688,7 @@
           <a:bodyPr/>
           <a:lstStyle/>
           <a:p>
-            <a:fld id="{C7A2DB92-9456-47D0-8600-630C5FFA4FE3}" type="slidenum">
+            <a:fld id="{7A7055FF-A2D1-4FD4-8ACA-4FA8879A8D96}" type="slidenum">
               <a:rPr kumimoji="1" lang="ja-JP" altLang="en-US" smtClean="0"/>
               <a:t>‹#›</a:t>
             </a:fld>
@@ -2699,7 +2699,7 @@
     </p:spTree>
     <p:extLst>
       <p:ext uri="{BB962C8B-B14F-4D97-AF65-F5344CB8AC3E}">
-        <p14:creationId xmlns:p14="http://schemas.microsoft.com/office/powerpoint/2010/main" val="2331248602"/>
+        <p14:creationId xmlns:p14="http://schemas.microsoft.com/office/powerpoint/2010/main" val="3346418626"/>
       </p:ext>
     </p:extLst>
   </p:cSld>
@@ -2731,7 +2731,7 @@
           <p:cNvPr id="2" name="タイトル 1">
             <a:extLst>
               <a:ext uri="{FF2B5EF4-FFF2-40B4-BE49-F238E27FC236}">
-                <a16:creationId xmlns:a16="http://schemas.microsoft.com/office/drawing/2014/main" id="{C654A769-4E9C-9730-0D75-8E395FAB6715}"/>
+                <a16:creationId xmlns:a16="http://schemas.microsoft.com/office/drawing/2014/main" id="{86A9B965-960A-DCFF-62BF-737000CD4B41}"/>
               </a:ext>
             </a:extLst>
           </p:cNvPr>
@@ -2768,7 +2768,7 @@
           <p:cNvPr id="3" name="図プレースホルダー 2">
             <a:extLst>
               <a:ext uri="{FF2B5EF4-FFF2-40B4-BE49-F238E27FC236}">
-                <a16:creationId xmlns:a16="http://schemas.microsoft.com/office/drawing/2014/main" id="{6A8C0E9A-8B5A-CB51-AD46-B53F34D9AF93}"/>
+                <a16:creationId xmlns:a16="http://schemas.microsoft.com/office/drawing/2014/main" id="{A36FA749-F41C-8C89-2E26-2F17A6C37D8C}"/>
               </a:ext>
             </a:extLst>
           </p:cNvPr>
@@ -2835,7 +2835,7 @@
           <p:cNvPr id="4" name="テキスト プレースホルダー 3">
             <a:extLst>
               <a:ext uri="{FF2B5EF4-FFF2-40B4-BE49-F238E27FC236}">
-                <a16:creationId xmlns:a16="http://schemas.microsoft.com/office/drawing/2014/main" id="{536697A6-A94A-FE26-97E8-668A9EB94C94}"/>
+                <a16:creationId xmlns:a16="http://schemas.microsoft.com/office/drawing/2014/main" id="{F8DC240C-62F7-7E28-88AD-BA5716C15823}"/>
               </a:ext>
             </a:extLst>
           </p:cNvPr>
@@ -2906,7 +2906,7 @@
           <p:cNvPr id="5" name="日付プレースホルダー 4">
             <a:extLst>
               <a:ext uri="{FF2B5EF4-FFF2-40B4-BE49-F238E27FC236}">
-                <a16:creationId xmlns:a16="http://schemas.microsoft.com/office/drawing/2014/main" id="{D40ED34D-549A-D949-EC21-45F1847F86CC}"/>
+                <a16:creationId xmlns:a16="http://schemas.microsoft.com/office/drawing/2014/main" id="{F1D9A699-AA41-40FC-87FC-25F782671BFE}"/>
               </a:ext>
             </a:extLst>
           </p:cNvPr>
@@ -2922,7 +2922,7 @@
           <a:bodyPr/>
           <a:lstStyle/>
           <a:p>
-            <a:fld id="{BF4A4B2D-BA0A-4902-A22A-03282CEDE376}" type="datetimeFigureOut">
+            <a:fld id="{76B38A17-16AD-4227-AE0A-A0302FF79D97}" type="datetimeFigureOut">
               <a:rPr kumimoji="1" lang="ja-JP" altLang="en-US" smtClean="0"/>
               <a:t>2026/7/30</a:t>
             </a:fld>
@@ -2935,7 +2935,7 @@
           <p:cNvPr id="6" name="フッター プレースホルダー 5">
             <a:extLst>
               <a:ext uri="{FF2B5EF4-FFF2-40B4-BE49-F238E27FC236}">
-                <a16:creationId xmlns:a16="http://schemas.microsoft.com/office/drawing/2014/main" id="{FD84452C-EBD0-A5EE-18B5-7700B782EBB1}"/>
+                <a16:creationId xmlns:a16="http://schemas.microsoft.com/office/drawing/2014/main" id="{8D0DFABD-E233-C072-F775-323293610B88}"/>
               </a:ext>
             </a:extLst>
           </p:cNvPr>
@@ -2960,7 +2960,7 @@
           <p:cNvPr id="7" name="スライド番号プレースホルダー 6">
             <a:extLst>
               <a:ext uri="{FF2B5EF4-FFF2-40B4-BE49-F238E27FC236}">
-                <a16:creationId xmlns:a16="http://schemas.microsoft.com/office/drawing/2014/main" id="{38C32478-3606-A2E7-9395-B2809F85159B}"/>
+                <a16:creationId xmlns:a16="http://schemas.microsoft.com/office/drawing/2014/main" id="{2D613166-5711-C2B8-A774-8BA389753FFC}"/>
               </a:ext>
             </a:extLst>
           </p:cNvPr>
@@ -2976,7 +2976,7 @@
           <a:bodyPr/>
           <a:lstStyle/>
           <a:p>
-            <a:fld id="{C7A2DB92-9456-47D0-8600-630C5FFA4FE3}" type="slidenum">
+            <a:fld id="{7A7055FF-A2D1-4FD4-8ACA-4FA8879A8D96}" type="slidenum">
               <a:rPr kumimoji="1" lang="ja-JP" altLang="en-US" smtClean="0"/>
               <a:t>‹#›</a:t>
             </a:fld>
@@ -2987,7 +2987,7 @@
     </p:spTree>
     <p:extLst>
       <p:ext uri="{BB962C8B-B14F-4D97-AF65-F5344CB8AC3E}">
-        <p14:creationId xmlns:p14="http://schemas.microsoft.com/office/powerpoint/2010/main" val="426989422"/>
+        <p14:creationId xmlns:p14="http://schemas.microsoft.com/office/powerpoint/2010/main" val="3579118531"/>
       </p:ext>
     </p:extLst>
   </p:cSld>
@@ -3024,7 +3024,7 @@
           <p:cNvPr id="2" name="タイトル プレースホルダー 1">
             <a:extLst>
               <a:ext uri="{FF2B5EF4-FFF2-40B4-BE49-F238E27FC236}">
-                <a16:creationId xmlns:a16="http://schemas.microsoft.com/office/drawing/2014/main" id="{ED7D84E1-61B7-C0DD-D71D-6BD013D3789B}"/>
+                <a16:creationId xmlns:a16="http://schemas.microsoft.com/office/drawing/2014/main" id="{403B32F6-2173-7559-C924-DD66C8AF13C1}"/>
               </a:ext>
             </a:extLst>
           </p:cNvPr>
@@ -3062,7 +3062,7 @@
           <p:cNvPr id="3" name="テキスト プレースホルダー 2">
             <a:extLst>
               <a:ext uri="{FF2B5EF4-FFF2-40B4-BE49-F238E27FC236}">
-                <a16:creationId xmlns:a16="http://schemas.microsoft.com/office/drawing/2014/main" id="{63636299-093B-6063-BE3F-B0B2A2397042}"/>
+                <a16:creationId xmlns:a16="http://schemas.microsoft.com/office/drawing/2014/main" id="{DC2F058F-A038-33CB-C529-9214CA0EB8A3}"/>
               </a:ext>
             </a:extLst>
           </p:cNvPr>
@@ -3161,7 +3161,7 @@
           <p:cNvPr id="4" name="日付プレースホルダー 3">
             <a:extLst>
               <a:ext uri="{FF2B5EF4-FFF2-40B4-BE49-F238E27FC236}">
-                <a16:creationId xmlns:a16="http://schemas.microsoft.com/office/drawing/2014/main" id="{BB7DFF46-8552-4004-B7D6-49A2B4DF42E8}"/>
+                <a16:creationId xmlns:a16="http://schemas.microsoft.com/office/drawing/2014/main" id="{D40D2415-715A-7C6E-4053-F22FC64B9216}"/>
               </a:ext>
             </a:extLst>
           </p:cNvPr>
@@ -3195,7 +3195,7 @@
             </a:lvl1pPr>
           </a:lstStyle>
           <a:p>
-            <a:fld id="{BF4A4B2D-BA0A-4902-A22A-03282CEDE376}" type="datetimeFigureOut">
+            <a:fld id="{76B38A17-16AD-4227-AE0A-A0302FF79D97}" type="datetimeFigureOut">
               <a:rPr kumimoji="1" lang="ja-JP" altLang="en-US" smtClean="0"/>
               <a:t>2026/7/30</a:t>
             </a:fld>
@@ -3208,7 +3208,7 @@
           <p:cNvPr id="5" name="フッター プレースホルダー 4">
             <a:extLst>
               <a:ext uri="{FF2B5EF4-FFF2-40B4-BE49-F238E27FC236}">
-                <a16:creationId xmlns:a16="http://schemas.microsoft.com/office/drawing/2014/main" id="{784E5A83-D9B5-AD94-3420-C20231F7E72C}"/>
+                <a16:creationId xmlns:a16="http://schemas.microsoft.com/office/drawing/2014/main" id="{075682FA-7B0B-766A-5D64-32E978FDE2BF}"/>
               </a:ext>
             </a:extLst>
           </p:cNvPr>
@@ -3251,7 +3251,7 @@
           <p:cNvPr id="6" name="スライド番号プレースホルダー 5">
             <a:extLst>
               <a:ext uri="{FF2B5EF4-FFF2-40B4-BE49-F238E27FC236}">
-                <a16:creationId xmlns:a16="http://schemas.microsoft.com/office/drawing/2014/main" id="{140C484F-AF49-940D-83B1-D140F319FE82}"/>
+                <a16:creationId xmlns:a16="http://schemas.microsoft.com/office/drawing/2014/main" id="{120C4F54-A8CA-7E6C-124E-6792F6BCD212}"/>
               </a:ext>
             </a:extLst>
           </p:cNvPr>
@@ -3285,7 +3285,7 @@
             </a:lvl1pPr>
           </a:lstStyle>
           <a:p>
-            <a:fld id="{C7A2DB92-9456-47D0-8600-630C5FFA4FE3}" type="slidenum">
+            <a:fld id="{7A7055FF-A2D1-4FD4-8ACA-4FA8879A8D96}" type="slidenum">
               <a:rPr kumimoji="1" lang="ja-JP" altLang="en-US" smtClean="0"/>
               <a:t>‹#›</a:t>
             </a:fld>
@@ -3296,7 +3296,7 @@
     </p:spTree>
     <p:extLst>
       <p:ext uri="{BB962C8B-B14F-4D97-AF65-F5344CB8AC3E}">
-        <p14:creationId xmlns:p14="http://schemas.microsoft.com/office/powerpoint/2010/main" val="3874203058"/>
+        <p14:creationId xmlns:p14="http://schemas.microsoft.com/office/powerpoint/2010/main" val="1145711051"/>
       </p:ext>
     </p:extLst>
   </p:cSld>
@@ -3619,7 +3619,7 @@
           <p:cNvPr id="2" name="テキスト ボックス 1">
             <a:extLst>
               <a:ext uri="{FF2B5EF4-FFF2-40B4-BE49-F238E27FC236}">
-                <a16:creationId xmlns:a16="http://schemas.microsoft.com/office/drawing/2014/main" id="{1D62EE41-7063-F246-1559-4369D8724611}"/>
+                <a16:creationId xmlns:a16="http://schemas.microsoft.com/office/drawing/2014/main" id="{AA6971A9-613B-73E8-B056-1A572A864D84}"/>
               </a:ext>
             </a:extLst>
           </p:cNvPr>
@@ -3665,7 +3665,7 @@
           <p:cNvPr id="3" name="テキスト ボックス 2">
             <a:extLst>
               <a:ext uri="{FF2B5EF4-FFF2-40B4-BE49-F238E27FC236}">
-                <a16:creationId xmlns:a16="http://schemas.microsoft.com/office/drawing/2014/main" id="{AD96EDE7-6431-E87A-3014-A4C4EF64F517}"/>
+                <a16:creationId xmlns:a16="http://schemas.microsoft.com/office/drawing/2014/main" id="{B39EAF69-D704-C2D4-E1B4-7A0F6F5A2860}"/>
               </a:ext>
             </a:extLst>
           </p:cNvPr>
@@ -3714,7 +3714,7 @@
           <p:cNvPr id="4" name="テキスト ボックス 3">
             <a:extLst>
               <a:ext uri="{FF2B5EF4-FFF2-40B4-BE49-F238E27FC236}">
-                <a16:creationId xmlns:a16="http://schemas.microsoft.com/office/drawing/2014/main" id="{C12FD5AC-3FBD-9970-D916-1DF98EC9CA5B}"/>
+                <a16:creationId xmlns:a16="http://schemas.microsoft.com/office/drawing/2014/main" id="{385CF62E-3AD9-FF1D-2C19-A5F2D854420E}"/>
               </a:ext>
             </a:extLst>
           </p:cNvPr>
@@ -3754,7 +3754,7 @@
           <p:cNvPr id="5" name="テキスト ボックス 4">
             <a:extLst>
               <a:ext uri="{FF2B5EF4-FFF2-40B4-BE49-F238E27FC236}">
-                <a16:creationId xmlns:a16="http://schemas.microsoft.com/office/drawing/2014/main" id="{5412329F-145D-986F-414A-E5F2CB11308B}"/>
+                <a16:creationId xmlns:a16="http://schemas.microsoft.com/office/drawing/2014/main" id="{79A8A29F-210B-AD37-0A7E-DF9D89FCB660}"/>
               </a:ext>
             </a:extLst>
           </p:cNvPr>
@@ -3801,7 +3801,7 @@
             <a:hlinkClick r:id="" action="ppaction://media"/>
             <a:extLst>
               <a:ext uri="{FF2B5EF4-FFF2-40B4-BE49-F238E27FC236}">
-                <a16:creationId xmlns:a16="http://schemas.microsoft.com/office/drawing/2014/main" id="{946DC1C8-8B79-A17F-17A7-F1259498C592}"/>
+                <a16:creationId xmlns:a16="http://schemas.microsoft.com/office/drawing/2014/main" id="{ADBF5E60-358E-5F23-9995-77804A634851}"/>
               </a:ext>
             </a:extLst>
           </p:cNvPr>
@@ -3836,7 +3836,7 @@
     </p:spTree>
     <p:extLst>
       <p:ext uri="{BB962C8B-B14F-4D97-AF65-F5344CB8AC3E}">
-        <p14:creationId xmlns:p14="http://schemas.microsoft.com/office/powerpoint/2010/main" val="4176167689"/>
+        <p14:creationId xmlns:p14="http://schemas.microsoft.com/office/powerpoint/2010/main" val="2447789666"/>
       </p:ext>
     </p:extLst>
   </p:cSld>
@@ -3960,7 +3960,7 @@
           <p:cNvPr id="2" name="テキスト ボックス 1">
             <a:extLst>
               <a:ext uri="{FF2B5EF4-FFF2-40B4-BE49-F238E27FC236}">
-                <a16:creationId xmlns:a16="http://schemas.microsoft.com/office/drawing/2014/main" id="{EF440F7F-99AB-FE6C-8484-3D8361E347F2}"/>
+                <a16:creationId xmlns:a16="http://schemas.microsoft.com/office/drawing/2014/main" id="{A391FB70-267B-37CC-E3D7-0B0FC5BC1A87}"/>
               </a:ext>
             </a:extLst>
           </p:cNvPr>
@@ -4006,7 +4006,7 @@
           <p:cNvPr id="3" name="テキスト ボックス 2">
             <a:extLst>
               <a:ext uri="{FF2B5EF4-FFF2-40B4-BE49-F238E27FC236}">
-                <a16:creationId xmlns:a16="http://schemas.microsoft.com/office/drawing/2014/main" id="{86EB5C67-6EBE-C487-D6F6-583AB537715A}"/>
+                <a16:creationId xmlns:a16="http://schemas.microsoft.com/office/drawing/2014/main" id="{5F21D3F0-801F-1394-7B9F-E255A67710E1}"/>
               </a:ext>
             </a:extLst>
           </p:cNvPr>
@@ -4046,7 +4046,7 @@
           <p:cNvPr id="4" name="テキスト ボックス 3">
             <a:extLst>
               <a:ext uri="{FF2B5EF4-FFF2-40B4-BE49-F238E27FC236}">
-                <a16:creationId xmlns:a16="http://schemas.microsoft.com/office/drawing/2014/main" id="{56857E97-A037-39DE-4AA9-78D7ECCEA77C}"/>
+                <a16:creationId xmlns:a16="http://schemas.microsoft.com/office/drawing/2014/main" id="{91E5ABEA-55D3-7FA6-4570-6380E0C8AEA3}"/>
               </a:ext>
             </a:extLst>
           </p:cNvPr>
@@ -4056,7 +4056,7 @@
         <p:spPr>
           <a:xfrm>
             <a:off x="533400" y="3429000"/>
-            <a:ext cx="10795000" cy="707886"/>
+            <a:ext cx="10795000" cy="400110"/>
           </a:xfrm>
           <a:prstGeom prst="rect">
             <a:avLst/>
@@ -4076,14 +4076,17 @@
                 </a:solidFill>
                 <a:latin typeface="Arial" panose="020B0604020202020204" pitchFamily="34" charset="0"/>
               </a:rPr>
-              <a:t>Bowling Score Hub Recommended repository: bowling score hub Confirmed domain: bowlscore</a:t>
-            </a:r>
-            <a:endParaRPr kumimoji="1" lang="ja-JP" altLang="en-US" sz="2000">
-              <a:solidFill>
-                <a:srgbClr val="333333"/>
-              </a:solidFill>
-              <a:latin typeface="Arial" panose="020B0604020202020204" pitchFamily="34" charset="0"/>
-            </a:endParaRPr>
+              <a:t>Bowling Score Hub</a:t>
+            </a:r>
+            <a:r>
+              <a:rPr kumimoji="1" lang="ja-JP" altLang="en-US" sz="2000">
+                <a:solidFill>
+                  <a:srgbClr val="333333"/>
+                </a:solidFill>
+                <a:latin typeface="Arial" panose="020B0604020202020204" pitchFamily="34" charset="0"/>
+              </a:rPr>
+              <a:t>の目的、構成、実装を公開コードから確認できるプロジェクトです。</a:t>
+            </a:r>
           </a:p>
         </p:txBody>
       </p:sp>
@@ -4092,7 +4095,7 @@
           <p:cNvPr id="5" name="テキスト ボックス 4">
             <a:extLst>
               <a:ext uri="{FF2B5EF4-FFF2-40B4-BE49-F238E27FC236}">
-                <a16:creationId xmlns:a16="http://schemas.microsoft.com/office/drawing/2014/main" id="{2F55AE80-8CF7-7397-59C4-B687208203B6}"/>
+                <a16:creationId xmlns:a16="http://schemas.microsoft.com/office/drawing/2014/main" id="{BC1E3AF0-C7A2-AEF7-B57B-12CC09FA6EBC}"/>
               </a:ext>
             </a:extLst>
           </p:cNvPr>
@@ -4139,7 +4142,7 @@
             <a:hlinkClick r:id="" action="ppaction://media"/>
             <a:extLst>
               <a:ext uri="{FF2B5EF4-FFF2-40B4-BE49-F238E27FC236}">
-                <a16:creationId xmlns:a16="http://schemas.microsoft.com/office/drawing/2014/main" id="{24AE2515-79A2-9A8B-A5B0-2B58ABA587DB}"/>
+                <a16:creationId xmlns:a16="http://schemas.microsoft.com/office/drawing/2014/main" id="{686D2D5D-F804-4898-38C4-A9021F0B700E}"/>
               </a:ext>
             </a:extLst>
           </p:cNvPr>
@@ -4174,7 +4177,7 @@
     </p:spTree>
     <p:extLst>
       <p:ext uri="{BB962C8B-B14F-4D97-AF65-F5344CB8AC3E}">
-        <p14:creationId xmlns:p14="http://schemas.microsoft.com/office/powerpoint/2010/main" val="3449703659"/>
+        <p14:creationId xmlns:p14="http://schemas.microsoft.com/office/powerpoint/2010/main" val="1932827386"/>
       </p:ext>
     </p:extLst>
   </p:cSld>
@@ -4217,7 +4220,7 @@
                                   <p:childTnLst>
                                     <p:cmd type="call" cmd="playFrom(0.0)">
                                       <p:cBhvr>
-                                        <p:cTn id="6" dur="7426" fill="hold"/>
+                                        <p:cTn id="6" dur="7516" fill="hold"/>
                                         <p:tgtEl>
                                           <p:spTgt spid="6"/>
                                         </p:tgtEl>
@@ -4298,7 +4301,7 @@
           <p:cNvPr id="2" name="テキスト ボックス 1">
             <a:extLst>
               <a:ext uri="{FF2B5EF4-FFF2-40B4-BE49-F238E27FC236}">
-                <a16:creationId xmlns:a16="http://schemas.microsoft.com/office/drawing/2014/main" id="{2E88BF20-0DE1-F8B1-B3CB-D0B9D632EAA1}"/>
+                <a16:creationId xmlns:a16="http://schemas.microsoft.com/office/drawing/2014/main" id="{24626B0B-A1F2-D828-A4C2-28E005FE810C}"/>
               </a:ext>
             </a:extLst>
           </p:cNvPr>
@@ -4344,7 +4347,7 @@
           <p:cNvPr id="3" name="テキスト ボックス 2">
             <a:extLst>
               <a:ext uri="{FF2B5EF4-FFF2-40B4-BE49-F238E27FC236}">
-                <a16:creationId xmlns:a16="http://schemas.microsoft.com/office/drawing/2014/main" id="{82873B1E-FD2A-58E2-52C9-B01382963FC8}"/>
+                <a16:creationId xmlns:a16="http://schemas.microsoft.com/office/drawing/2014/main" id="{658EB336-EF07-8B8A-8450-407B39011205}"/>
               </a:ext>
             </a:extLst>
           </p:cNvPr>
@@ -4384,7 +4387,7 @@
           <p:cNvPr id="4" name="テキスト ボックス 3">
             <a:extLst>
               <a:ext uri="{FF2B5EF4-FFF2-40B4-BE49-F238E27FC236}">
-                <a16:creationId xmlns:a16="http://schemas.microsoft.com/office/drawing/2014/main" id="{594E44FD-F00D-8641-DB5C-BCF848C5676D}"/>
+                <a16:creationId xmlns:a16="http://schemas.microsoft.com/office/drawing/2014/main" id="{FC2B7606-3F04-5902-148E-545E2CB86A9E}"/>
               </a:ext>
             </a:extLst>
           </p:cNvPr>
@@ -4479,7 +4482,7 @@
           <p:cNvPr id="5" name="テキスト ボックス 4">
             <a:extLst>
               <a:ext uri="{FF2B5EF4-FFF2-40B4-BE49-F238E27FC236}">
-                <a16:creationId xmlns:a16="http://schemas.microsoft.com/office/drawing/2014/main" id="{D94A7888-4C51-970B-EA22-EF79AE3971AA}"/>
+                <a16:creationId xmlns:a16="http://schemas.microsoft.com/office/drawing/2014/main" id="{FD0D32E1-4CCB-AD56-1946-E7D8679DD3EA}"/>
               </a:ext>
             </a:extLst>
           </p:cNvPr>
@@ -4526,7 +4529,7 @@
             <a:hlinkClick r:id="" action="ppaction://media"/>
             <a:extLst>
               <a:ext uri="{FF2B5EF4-FFF2-40B4-BE49-F238E27FC236}">
-                <a16:creationId xmlns:a16="http://schemas.microsoft.com/office/drawing/2014/main" id="{A3A9B5F2-6B6D-33FE-C4DC-A8F1D635287B}"/>
+                <a16:creationId xmlns:a16="http://schemas.microsoft.com/office/drawing/2014/main" id="{C208C2FF-894C-A395-C2EF-0D5B5321AB70}"/>
               </a:ext>
             </a:extLst>
           </p:cNvPr>
@@ -4561,7 +4564,7 @@
     </p:spTree>
     <p:extLst>
       <p:ext uri="{BB962C8B-B14F-4D97-AF65-F5344CB8AC3E}">
-        <p14:creationId xmlns:p14="http://schemas.microsoft.com/office/powerpoint/2010/main" val="175767205"/>
+        <p14:creationId xmlns:p14="http://schemas.microsoft.com/office/powerpoint/2010/main" val="1302590186"/>
       </p:ext>
     </p:extLst>
   </p:cSld>
@@ -4685,7 +4688,7 @@
           <p:cNvPr id="2" name="テキスト ボックス 1">
             <a:extLst>
               <a:ext uri="{FF2B5EF4-FFF2-40B4-BE49-F238E27FC236}">
-                <a16:creationId xmlns:a16="http://schemas.microsoft.com/office/drawing/2014/main" id="{AE24CD14-5462-AD9A-82C7-349DD499BD37}"/>
+                <a16:creationId xmlns:a16="http://schemas.microsoft.com/office/drawing/2014/main" id="{285E50A6-8CEB-9D2F-264E-C89ACFB8D246}"/>
               </a:ext>
             </a:extLst>
           </p:cNvPr>
@@ -4731,7 +4734,7 @@
           <p:cNvPr id="3" name="テキスト ボックス 2">
             <a:extLst>
               <a:ext uri="{FF2B5EF4-FFF2-40B4-BE49-F238E27FC236}">
-                <a16:creationId xmlns:a16="http://schemas.microsoft.com/office/drawing/2014/main" id="{066F74A7-3C66-99E7-02F9-22B1E97EF425}"/>
+                <a16:creationId xmlns:a16="http://schemas.microsoft.com/office/drawing/2014/main" id="{D77C62AF-71B8-01A6-1021-4A8F6A363838}"/>
               </a:ext>
             </a:extLst>
           </p:cNvPr>
@@ -4771,7 +4774,7 @@
           <p:cNvPr id="4" name="テキスト ボックス 3">
             <a:extLst>
               <a:ext uri="{FF2B5EF4-FFF2-40B4-BE49-F238E27FC236}">
-                <a16:creationId xmlns:a16="http://schemas.microsoft.com/office/drawing/2014/main" id="{96BC23DE-2FCD-C993-0833-720BCCF880EA}"/>
+                <a16:creationId xmlns:a16="http://schemas.microsoft.com/office/drawing/2014/main" id="{98ECD79B-C13C-27A0-F026-4658B33A764B}"/>
               </a:ext>
             </a:extLst>
           </p:cNvPr>
@@ -4881,7 +4884,7 @@
           <p:cNvPr id="5" name="テキスト ボックス 4">
             <a:extLst>
               <a:ext uri="{FF2B5EF4-FFF2-40B4-BE49-F238E27FC236}">
-                <a16:creationId xmlns:a16="http://schemas.microsoft.com/office/drawing/2014/main" id="{9E00F261-BD4B-187F-7569-D673CCEEF26D}"/>
+                <a16:creationId xmlns:a16="http://schemas.microsoft.com/office/drawing/2014/main" id="{34314610-933A-6341-FD2B-58007F13C2D4}"/>
               </a:ext>
             </a:extLst>
           </p:cNvPr>
@@ -4928,7 +4931,7 @@
             <a:hlinkClick r:id="" action="ppaction://media"/>
             <a:extLst>
               <a:ext uri="{FF2B5EF4-FFF2-40B4-BE49-F238E27FC236}">
-                <a16:creationId xmlns:a16="http://schemas.microsoft.com/office/drawing/2014/main" id="{4D9CEF94-38C3-ACB4-BD5D-DE64B6FC08CC}"/>
+                <a16:creationId xmlns:a16="http://schemas.microsoft.com/office/drawing/2014/main" id="{B77312FE-DB29-C67E-E82C-382770E286AF}"/>
               </a:ext>
             </a:extLst>
           </p:cNvPr>
@@ -4963,7 +4966,7 @@
     </p:spTree>
     <p:extLst>
       <p:ext uri="{BB962C8B-B14F-4D97-AF65-F5344CB8AC3E}">
-        <p14:creationId xmlns:p14="http://schemas.microsoft.com/office/powerpoint/2010/main" val="2563893431"/>
+        <p14:creationId xmlns:p14="http://schemas.microsoft.com/office/powerpoint/2010/main" val="1583232739"/>
       </p:ext>
     </p:extLst>
   </p:cSld>
@@ -5087,7 +5090,7 @@
           <p:cNvPr id="2" name="テキスト ボックス 1">
             <a:extLst>
               <a:ext uri="{FF2B5EF4-FFF2-40B4-BE49-F238E27FC236}">
-                <a16:creationId xmlns:a16="http://schemas.microsoft.com/office/drawing/2014/main" id="{43C48998-3DCE-6A5D-EB50-90F757C50BDD}"/>
+                <a16:creationId xmlns:a16="http://schemas.microsoft.com/office/drawing/2014/main" id="{CF8A8329-E52A-AED5-ECE2-F410D76848A9}"/>
               </a:ext>
             </a:extLst>
           </p:cNvPr>
@@ -5133,7 +5136,7 @@
           <p:cNvPr id="3" name="テキスト ボックス 2">
             <a:extLst>
               <a:ext uri="{FF2B5EF4-FFF2-40B4-BE49-F238E27FC236}">
-                <a16:creationId xmlns:a16="http://schemas.microsoft.com/office/drawing/2014/main" id="{8C2130C8-3482-6FF6-2228-E24F6B9A869A}"/>
+                <a16:creationId xmlns:a16="http://schemas.microsoft.com/office/drawing/2014/main" id="{64A64D39-0150-0EBF-289B-87C18DC73835}"/>
               </a:ext>
             </a:extLst>
           </p:cNvPr>
@@ -5173,7 +5176,7 @@
           <p:cNvPr id="4" name="テキスト ボックス 3">
             <a:extLst>
               <a:ext uri="{FF2B5EF4-FFF2-40B4-BE49-F238E27FC236}">
-                <a16:creationId xmlns:a16="http://schemas.microsoft.com/office/drawing/2014/main" id="{623C8BFA-AB65-B5D7-BA26-CCB570EC919F}"/>
+                <a16:creationId xmlns:a16="http://schemas.microsoft.com/office/drawing/2014/main" id="{CBAC433E-AB49-9DB4-0E7B-9DF3CDD631D8}"/>
               </a:ext>
             </a:extLst>
           </p:cNvPr>
@@ -5197,20 +5200,14 @@
           <a:lstStyle/>
           <a:p>
             <a:r>
-              <a:rPr kumimoji="1" lang="en-US" altLang="ja-JP" sz="2000">
+              <a:rPr kumimoji="1" lang="ja-JP" altLang="en-US" sz="2000">
                 <a:solidFill>
                   <a:srgbClr val="333333"/>
                 </a:solidFill>
                 <a:latin typeface="Arial" panose="020B0604020202020204" pitchFamily="34" charset="0"/>
               </a:rPr>
-              <a:t>Set confirmed custom domain</a:t>
-            </a:r>
-            <a:endParaRPr kumimoji="1" lang="ja-JP" altLang="en-US" sz="2000">
-              <a:solidFill>
-                <a:srgbClr val="333333"/>
-              </a:solidFill>
-              <a:latin typeface="Arial" panose="020B0604020202020204" pitchFamily="34" charset="0"/>
-            </a:endParaRPr>
+              <a:t>直近のコミットでは、実装の見直しと継続的な改善が行われました。</a:t>
+            </a:r>
           </a:p>
         </p:txBody>
       </p:sp>
@@ -5219,7 +5216,7 @@
           <p:cNvPr id="5" name="テキスト ボックス 4">
             <a:extLst>
               <a:ext uri="{FF2B5EF4-FFF2-40B4-BE49-F238E27FC236}">
-                <a16:creationId xmlns:a16="http://schemas.microsoft.com/office/drawing/2014/main" id="{E1A0917E-9A63-A666-C76A-9A8B14406C22}"/>
+                <a16:creationId xmlns:a16="http://schemas.microsoft.com/office/drawing/2014/main" id="{2063D704-A96B-459B-AC8C-2049E00F8A4E}"/>
               </a:ext>
             </a:extLst>
           </p:cNvPr>
@@ -5266,7 +5263,7 @@
             <a:hlinkClick r:id="" action="ppaction://media"/>
             <a:extLst>
               <a:ext uri="{FF2B5EF4-FFF2-40B4-BE49-F238E27FC236}">
-                <a16:creationId xmlns:a16="http://schemas.microsoft.com/office/drawing/2014/main" id="{E7F8401E-EF1C-4E8B-C2C6-67E6C88958DD}"/>
+                <a16:creationId xmlns:a16="http://schemas.microsoft.com/office/drawing/2014/main" id="{097F6DD8-9A81-8ACD-0866-227F82EED518}"/>
               </a:ext>
             </a:extLst>
           </p:cNvPr>
@@ -5301,7 +5298,7 @@
     </p:spTree>
     <p:extLst>
       <p:ext uri="{BB962C8B-B14F-4D97-AF65-F5344CB8AC3E}">
-        <p14:creationId xmlns:p14="http://schemas.microsoft.com/office/powerpoint/2010/main" val="3430514392"/>
+        <p14:creationId xmlns:p14="http://schemas.microsoft.com/office/powerpoint/2010/main" val="4146456463"/>
       </p:ext>
     </p:extLst>
   </p:cSld>
@@ -5344,7 +5341,7 @@
                                   <p:childTnLst>
                                     <p:cmd type="call" cmd="playFrom(0.0)">
                                       <p:cBhvr>
-                                        <p:cTn id="6" dur="6451" fill="hold"/>
+                                        <p:cTn id="6" dur="6076" fill="hold"/>
                                         <p:tgtEl>
                                           <p:spTgt spid="6"/>
                                         </p:tgtEl>
@@ -5425,7 +5422,7 @@
           <p:cNvPr id="2" name="テキスト ボックス 1">
             <a:extLst>
               <a:ext uri="{FF2B5EF4-FFF2-40B4-BE49-F238E27FC236}">
-                <a16:creationId xmlns:a16="http://schemas.microsoft.com/office/drawing/2014/main" id="{75DFFEAC-244F-4988-EC47-C558BE99CB87}"/>
+                <a16:creationId xmlns:a16="http://schemas.microsoft.com/office/drawing/2014/main" id="{5ED1A0C2-EC61-1041-F12C-5861C9DA7CFE}"/>
               </a:ext>
             </a:extLst>
           </p:cNvPr>
@@ -5471,7 +5468,7 @@
           <p:cNvPr id="3" name="テキスト ボックス 2">
             <a:extLst>
               <a:ext uri="{FF2B5EF4-FFF2-40B4-BE49-F238E27FC236}">
-                <a16:creationId xmlns:a16="http://schemas.microsoft.com/office/drawing/2014/main" id="{BCD207AB-547E-D9F3-9ADF-60C9DEE7EBC4}"/>
+                <a16:creationId xmlns:a16="http://schemas.microsoft.com/office/drawing/2014/main" id="{DD7F2251-946F-5891-FC0E-32EF7EB71C31}"/>
               </a:ext>
             </a:extLst>
           </p:cNvPr>
@@ -5511,7 +5508,7 @@
           <p:cNvPr id="4" name="テキスト ボックス 3">
             <a:extLst>
               <a:ext uri="{FF2B5EF4-FFF2-40B4-BE49-F238E27FC236}">
-                <a16:creationId xmlns:a16="http://schemas.microsoft.com/office/drawing/2014/main" id="{90D3FDD4-C85D-D151-97D0-7C444866F7C4}"/>
+                <a16:creationId xmlns:a16="http://schemas.microsoft.com/office/drawing/2014/main" id="{8332E95B-1976-39DA-291B-5C06CF6EE0C1}"/>
               </a:ext>
             </a:extLst>
           </p:cNvPr>
@@ -5576,7 +5573,7 @@
           <p:cNvPr id="5" name="テキスト ボックス 4">
             <a:extLst>
               <a:ext uri="{FF2B5EF4-FFF2-40B4-BE49-F238E27FC236}">
-                <a16:creationId xmlns:a16="http://schemas.microsoft.com/office/drawing/2014/main" id="{DB477AB9-58C7-D147-D20F-4F4C11455292}"/>
+                <a16:creationId xmlns:a16="http://schemas.microsoft.com/office/drawing/2014/main" id="{24739972-5C5F-FA85-A5F0-7ECC3F80940A}"/>
               </a:ext>
             </a:extLst>
           </p:cNvPr>
@@ -5623,7 +5620,7 @@
             <a:hlinkClick r:id="" action="ppaction://media"/>
             <a:extLst>
               <a:ext uri="{FF2B5EF4-FFF2-40B4-BE49-F238E27FC236}">
-                <a16:creationId xmlns:a16="http://schemas.microsoft.com/office/drawing/2014/main" id="{1F3CC72D-4CEF-E860-9D4A-4837AF098666}"/>
+                <a16:creationId xmlns:a16="http://schemas.microsoft.com/office/drawing/2014/main" id="{A1BDBAF8-59E6-D1D3-215E-83E86022B18E}"/>
               </a:ext>
             </a:extLst>
           </p:cNvPr>
@@ -5658,7 +5655,7 @@
     </p:spTree>
     <p:extLst>
       <p:ext uri="{BB962C8B-B14F-4D97-AF65-F5344CB8AC3E}">
-        <p14:creationId xmlns:p14="http://schemas.microsoft.com/office/powerpoint/2010/main" val="1054806539"/>
+        <p14:creationId xmlns:p14="http://schemas.microsoft.com/office/powerpoint/2010/main" val="2629647290"/>
       </p:ext>
     </p:extLst>
   </p:cSld>
